--- a/Topic_A/Exam_Practice/AT-A-L02_Writing_Workshop_Calendar_Dates_and_the_School_Week.pptx
+++ b/Topic_A/Exam_Practice/AT-A-L02_Writing_Workshop_Calendar_Dates_and_the_School_Week.pptx
@@ -2678,7 +2678,7 @@
                 <a:latin typeface="Cambria" pitchFamily="34" charset="0"/>
                 <a:cs typeface="Amiri" pitchFamily="2" charset="-78"/>
               </a:rPr>
-              <a:t>Writing Workshop — Calendar, Dates and the School Week</a:t>
+              <a:t>Writing Workshop — Calendar and the School Week</a:t>
             </a:r>
             <a:endParaRPr lang="en-US" sz="2650" dirty="0"/>
           </a:p>
@@ -2709,16 +2709,16 @@
               <a:buNone/>
             </a:pPr>
             <a:r>
-              <a:rPr lang="ar-SA" altLang="en-US" sz="3200" b="1" dirty="0">
+              <a:rPr lang="ar-SA" altLang="en-US" sz="3600" b="1" dirty="0">
                 <a:solidFill>
                   <a:srgbClr val="D4AF37"/>
                 </a:solidFill>
                 <a:latin typeface="Amiri" pitchFamily="2" charset="-78"/>
                 <a:cs typeface="Amiri" pitchFamily="2" charset="-78"/>
               </a:rPr>
-              <a:t>وَرْشَةُ الكِتَابَةِ — التَّقْوِيمُ وَالتَّوَارِيخُ وَالأُسْبُوعُ الدِّرَاسِيُّ</a:t>
-            </a:r>
-            <a:endParaRPr lang="ar-SA" sz="3200" dirty="0"/>
+              <a:t>وَرْشَةُ الكِتَابَةِ — التَّقْوِيمُ وَالأُسْبُوعُ الدِّرَاسِيُّ</a:t>
+            </a:r>
+            <a:endParaRPr lang="ar-SA" sz="3600" dirty="0"/>
           </a:p>
         </p:txBody>
       </p:sp>

--- a/Topic_A/Exam_Practice/AT-A-L02_Writing_Workshop_Calendar_Dates_and_the_School_Week.pptx
+++ b/Topic_A/Exam_Practice/AT-A-L02_Writing_Workshop_Calendar_Dates_and_the_School_Week.pptx
@@ -784,7 +784,11 @@
           <a:lstStyle/>
           <a:p>
             <a:r>
-              <a:rPr lang="en-US" dirty="0"/>
+              <a:rPr lang="ar-SA" dirty="0">
+                <a:latin typeface="Amiri" pitchFamily="2" charset="-78"/>
+                <a:ea typeface="Amiri" pitchFamily="2" charset="-78"/>
+                <a:cs typeface="Amiri" pitchFamily="2" charset="-78"/>
+              </a:rPr>
               <a:t>Q3 (3 min to choose and read). Title (أ) suits Core and Develop; title (ب) suits Stretch.</a:t>
             </a:r>
             <a:endParaRPr lang="en-US" dirty="0"/>
@@ -1403,7 +1407,11 @@
           <a:lstStyle/>
           <a:p>
             <a:r>
-              <a:rPr lang="en-US" dirty="0"/>
+              <a:rPr lang="ar-SA" dirty="0">
+                <a:latin typeface="Amiri" pitchFamily="2" charset="-78"/>
+                <a:ea typeface="Amiri" pitchFamily="2" charset="-78"/>
+                <a:cs typeface="Amiri" pitchFamily="2" charset="-78"/>
+              </a:rPr>
               <a:t>WELCOME (1 min) — while students join.
 • Greet each student by name as they arrive: السَّلَامُ عَلَيْكُمْ. Take the register (Pastoral Tracker: attendance 0/1).
 • 2-MINUTE CHECK-IN (SEND training): a private chat to any student who seemed unsettled last lesson — “Are you okay today? 👍 / 👎”.
@@ -1672,7 +1680,11 @@
           <a:lstStyle/>
           <a:p>
             <a:r>
-              <a:rPr lang="en-US" dirty="0"/>
+              <a:rPr lang="ar-SA" dirty="0">
+                <a:latin typeface="Amiri" pitchFamily="2" charset="-78"/>
+                <a:ea typeface="Amiri" pitchFamily="2" charset="-78"/>
+                <a:cs typeface="Amiri" pitchFamily="2" charset="-78"/>
+              </a:rPr>
               <a:t>QUESTION 1 — FORM FILLING. About 8 minutes. Core: boxes 1–6. Develop / Stretch: all 8. Watch the dual in box 7 (سَاعَتَانِ) and ordinals in dates (الثَّانِيَ عَشَرَ).</a:t>
             </a:r>
             <a:endParaRPr lang="en-US" dirty="0"/>
@@ -1936,7 +1948,11 @@
           <a:lstStyle/>
           <a:p>
             <a:r>
-              <a:rPr lang="en-US" dirty="0"/>
+              <a:rPr lang="ar-SA" dirty="0">
+                <a:latin typeface="Amiri" pitchFamily="2" charset="-78"/>
+                <a:ea typeface="Amiri" pitchFamily="2" charset="-78"/>
+                <a:cs typeface="Amiri" pitchFamily="2" charset="-78"/>
+              </a:rPr>
               <a:t>Question words: كَمْ (how many) · مَتَى (when) · مَا (what) · لِمَاذَا (why) · مَاذَا (what) — and notice the tense: فَعَلْتَ (past) · سَتَفْعَلُ (future).</a:t>
             </a:r>
             <a:endParaRPr lang="en-US" dirty="0"/>
@@ -2508,6 +2524,7 @@
                   <a:srgbClr val="D4AF37"/>
                 </a:solidFill>
                 <a:latin typeface="Amiri" pitchFamily="2" charset="-78"/>
+                <a:ea typeface="Amiri" pitchFamily="2" charset="-78"/>
                 <a:cs typeface="Amiri" pitchFamily="2" charset="-78"/>
               </a:rPr>
               <a:t>م</a:t>
@@ -2714,6 +2731,7 @@
                   <a:srgbClr val="D4AF37"/>
                 </a:solidFill>
                 <a:latin typeface="Amiri" pitchFamily="2" charset="-78"/>
+                <a:ea typeface="Amiri" pitchFamily="2" charset="-78"/>
                 <a:cs typeface="Amiri" pitchFamily="2" charset="-78"/>
               </a:rPr>
               <a:t>وَرْشَةُ الكِتَابَةِ — التَّقْوِيمُ وَالأُسْبُوعُ الدِّرَاسِيُّ</a:t>
@@ -3171,6 +3189,7 @@
                   <a:srgbClr val="D4AF37"/>
                 </a:solidFill>
                 <a:latin typeface="Amiri" pitchFamily="2" charset="-78"/>
+                <a:ea typeface="Amiri" pitchFamily="2" charset="-78"/>
                 <a:cs typeface="Amiri" pitchFamily="2" charset="-78"/>
               </a:rPr>
               <a:t>م</a:t>
@@ -3491,6 +3510,7 @@
                   <a:srgbClr val="8A6D1E"/>
                 </a:solidFill>
                 <a:latin typeface="Amiri" pitchFamily="2" charset="-78"/>
+                <a:ea typeface="Amiri" pitchFamily="2" charset="-78"/>
                 <a:cs typeface="Amiri" pitchFamily="2" charset="-78"/>
               </a:rPr>
               <a:t>نَمُوذَجُ الإِجَابَةِ</a:t>
@@ -3604,6 +3624,7 @@
                   <a:srgbClr val="1F2A37"/>
                 </a:solidFill>
                 <a:latin typeface="Amiri" pitchFamily="2" charset="-78"/>
+                <a:ea typeface="Amiri" pitchFamily="2" charset="-78"/>
                 <a:cs typeface="Amiri" pitchFamily="2" charset="-78"/>
               </a:rPr>
               <a:t>مَرْحَبًا يَا عَلِيُّ،</a:t>
@@ -3623,6 +3644,7 @@
                   <a:srgbClr val="1F2A37"/>
                 </a:solidFill>
                 <a:latin typeface="Amiri" pitchFamily="2" charset="-78"/>
+                <a:ea typeface="Amiri" pitchFamily="2" charset="-78"/>
                 <a:cs typeface="Amiri" pitchFamily="2" charset="-78"/>
               </a:rPr>
               <a:t>كَيْفَ حَالُكَ؟ أُرِيدُ أَنْ أُخْبِرَكَ عَنْ أُسْبُوعِي. أَدْرُسُ خَمْسَةَ أَيَّامٍ، مِنَ الإِثْنَيْنِ إِلَى الجُمُعَةِ. يَبْدَأُ اليَوْمُ فِي الثَّامِنَةِ وَالنِّصْفِ، وَيَنْتَهِي فِي الثَّالِثَةِ. يَوْمِي المُفَضَّلُ هُوَ الأَرْبِعَاءُ لِأَنَّ عِنْدِي حِصَّةَ الرِّيَاضَةِ، وَأُحِبُّهَا كَثِيرًا. فِي نِهَايَةِ الأُسْبُوعِ المَاضِي زُرْتُ جَدَّتِي وَلَعِبْتُ كُرَةَ القَدَمِ. تَبْدَأُ العُطْلَةُ فِي العِشْرِينَ مِنْ دِيسَمْبَرَ، وَسَوْفَ أُسَافِرُ إِلَى مِصْرَ مَعَ أُسْرَتِي.</a:t>
@@ -3642,6 +3664,7 @@
                   <a:srgbClr val="1F2A37"/>
                 </a:solidFill>
                 <a:latin typeface="Amiri" pitchFamily="2" charset="-78"/>
+                <a:ea typeface="Amiri" pitchFamily="2" charset="-78"/>
                 <a:cs typeface="Amiri" pitchFamily="2" charset="-78"/>
               </a:rPr>
               <a:t>إِلَى اللِّقَاءِ،</a:t>
@@ -3661,6 +3684,7 @@
                   <a:srgbClr val="1F2A37"/>
                 </a:solidFill>
                 <a:latin typeface="Amiri" pitchFamily="2" charset="-78"/>
+                <a:ea typeface="Amiri" pitchFamily="2" charset="-78"/>
                 <a:cs typeface="Amiri" pitchFamily="2" charset="-78"/>
               </a:rPr>
               <a:t>يُوسُفُ</a:t>
@@ -3824,11 +3848,12 @@
               <a:buNone/>
             </a:pPr>
             <a:r>
-              <a:rPr lang="en-US" sz="950" b="1" dirty="0">
+              <a:rPr lang="ar-SA" sz="950" b="1" dirty="0">
                 <a:solidFill>
                   <a:srgbClr val="FFFFFF"/>
                 </a:solidFill>
                 <a:latin typeface="Calibri" pitchFamily="34" charset="0"/>
+                <a:ea typeface="Amiri" pitchFamily="2" charset="-78"/>
                 <a:cs typeface="Amiri" pitchFamily="2" charset="-78"/>
               </a:rPr>
               <a:t>خَمْسَةَ أَيَّامٍ</a:t>
@@ -3889,11 +3914,12 @@
               <a:buNone/>
             </a:pPr>
             <a:r>
-              <a:rPr lang="en-US" sz="950" b="1" dirty="0">
+              <a:rPr lang="ar-SA" sz="950" b="1" dirty="0">
                 <a:solidFill>
                   <a:srgbClr val="FFFFFF"/>
                 </a:solidFill>
                 <a:latin typeface="Calibri" pitchFamily="34" charset="0"/>
+                <a:ea typeface="Amiri" pitchFamily="2" charset="-78"/>
                 <a:cs typeface="Amiri" pitchFamily="2" charset="-78"/>
               </a:rPr>
               <a:t>لِأَنَّ</a:t>
@@ -3954,11 +3980,12 @@
               <a:buNone/>
             </a:pPr>
             <a:r>
-              <a:rPr lang="en-US" sz="950" b="1" dirty="0">
+              <a:rPr lang="ar-SA" sz="950" b="1" dirty="0">
                 <a:solidFill>
                   <a:srgbClr val="FFFFFF"/>
                 </a:solidFill>
                 <a:latin typeface="Calibri" pitchFamily="34" charset="0"/>
+                <a:ea typeface="Amiri" pitchFamily="2" charset="-78"/>
                 <a:cs typeface="Amiri" pitchFamily="2" charset="-78"/>
               </a:rPr>
               <a:t>زُرْتُ</a:t>
@@ -4019,11 +4046,12 @@
               <a:buNone/>
             </a:pPr>
             <a:r>
-              <a:rPr lang="en-US" sz="950" b="1" dirty="0">
+              <a:rPr lang="ar-SA" sz="950" b="1" dirty="0">
                 <a:solidFill>
                   <a:srgbClr val="FFFFFF"/>
                 </a:solidFill>
                 <a:latin typeface="Calibri" pitchFamily="34" charset="0"/>
+                <a:ea typeface="Amiri" pitchFamily="2" charset="-78"/>
                 <a:cs typeface="Amiri" pitchFamily="2" charset="-78"/>
               </a:rPr>
               <a:t>وَسَوْفَ أُسَافِرُ</a:t>
@@ -4157,6 +4185,7 @@
                   <a:srgbClr val="D4AF37"/>
                 </a:solidFill>
                 <a:latin typeface="Amiri" pitchFamily="2" charset="-78"/>
+                <a:ea typeface="Amiri" pitchFamily="2" charset="-78"/>
                 <a:cs typeface="Amiri" pitchFamily="2" charset="-78"/>
               </a:rPr>
               <a:t>م</a:t>
@@ -4477,6 +4506,7 @@
                   <a:srgbClr val="8A6D1E"/>
                 </a:solidFill>
                 <a:latin typeface="Amiri" pitchFamily="2" charset="-78"/>
+                <a:ea typeface="Amiri" pitchFamily="2" charset="-78"/>
                 <a:cs typeface="Amiri" pitchFamily="2" charset="-78"/>
               </a:rPr>
               <a:t>نَمُوذَجُ الإِجَابَةِ</a:t>
@@ -4590,6 +4620,7 @@
                   <a:srgbClr val="1F2A37"/>
                 </a:solidFill>
                 <a:latin typeface="Amiri" pitchFamily="2" charset="-78"/>
+                <a:ea typeface="Amiri" pitchFamily="2" charset="-78"/>
                 <a:cs typeface="Amiri" pitchFamily="2" charset="-78"/>
               </a:rPr>
               <a:t>مَرْحَبًا يَا عَلِيُّ،</a:t>
@@ -4609,6 +4640,7 @@
                   <a:srgbClr val="1F2A37"/>
                 </a:solidFill>
                 <a:latin typeface="Amiri" pitchFamily="2" charset="-78"/>
+                <a:ea typeface="Amiri" pitchFamily="2" charset="-78"/>
                 <a:cs typeface="Amiri" pitchFamily="2" charset="-78"/>
               </a:rPr>
               <a:t>كَيْفَ حَالُكَ؟ أُرِيدُ أَنْ أُخْبِرَكَ عَنْ أُسْبُوعِي فِي المَدْرَسَةِ. أَدْرُسُ خَمْسَةَ أَيَّامٍ، مِنَ الإِثْنَيْنِ إِلَى الجُمُعَةِ. يَبْدَأُ اليَوْمُ الدِّرَاسِيُّ فِي الثَّامِنَةِ وَالنِّصْفِ، وَيَنْتَهِي فِي الثَّالِثَةِ وَالرُّبْعِ، وَأَتَنَاوَلُ الغَدَاءَ فِي المَدْرَسَةِ مَعَ أَصْدِقَائِي. يَوْمِي المُفَضَّلُ هُوَ الأَرْبِعَاءُ، لِأَنَّ عِنْدِي حِصَّتَيْنِ مِنَ الرِّيَاضَةِ، لٰكِنَّ يَوْمَ الثُّلَاثَاءِ مُتْعِبٌ جِدًّا. فِي نِهَايَةِ الأُسْبُوعِ المَاضِي زُرْتُ جَدَّتِي يَوْمَ السَّبْتِ، وَلَعِبْتُ كُرَةَ القَدَمِ يَوْمَ الأَحَدِ. سَتَبْدَأُ العُطْلَةُ القَادِمَةُ فِي العِشْرِينَ مِنْ دِيسَمْبَرَ، وَسَأُسَافِرُ إِلَى مِصْرَ مَعَ أُسْرَتِي أُسْبُوعَيْنِ. وَأَنْتَ، مَتَى تَبْدَأُ عُطْلَتُكَ؟</a:t>
@@ -4628,6 +4660,7 @@
                   <a:srgbClr val="1F2A37"/>
                 </a:solidFill>
                 <a:latin typeface="Amiri" pitchFamily="2" charset="-78"/>
+                <a:ea typeface="Amiri" pitchFamily="2" charset="-78"/>
                 <a:cs typeface="Amiri" pitchFamily="2" charset="-78"/>
               </a:rPr>
               <a:t>مَعَ تَحِيَّاتِي،</a:t>
@@ -4647,6 +4680,7 @@
                   <a:srgbClr val="1F2A37"/>
                 </a:solidFill>
                 <a:latin typeface="Amiri" pitchFamily="2" charset="-78"/>
+                <a:ea typeface="Amiri" pitchFamily="2" charset="-78"/>
                 <a:cs typeface="Amiri" pitchFamily="2" charset="-78"/>
               </a:rPr>
               <a:t>يُوسُفُ</a:t>
@@ -4810,11 +4844,12 @@
               <a:buNone/>
             </a:pPr>
             <a:r>
-              <a:rPr lang="en-US" sz="950" b="1" dirty="0">
+              <a:rPr lang="ar-SA" sz="950" b="1" dirty="0">
                 <a:solidFill>
                   <a:srgbClr val="FFFFFF"/>
                 </a:solidFill>
                 <a:latin typeface="Calibri" pitchFamily="34" charset="0"/>
+                <a:ea typeface="Amiri" pitchFamily="2" charset="-78"/>
                 <a:cs typeface="Amiri" pitchFamily="2" charset="-78"/>
               </a:rPr>
               <a:t>وَالرُّبْعِ</a:t>
@@ -4875,11 +4910,12 @@
               <a:buNone/>
             </a:pPr>
             <a:r>
-              <a:rPr lang="en-US" sz="950" b="1" dirty="0">
+              <a:rPr lang="ar-SA" sz="950" b="1" dirty="0">
                 <a:solidFill>
                   <a:srgbClr val="FFFFFF"/>
                 </a:solidFill>
                 <a:latin typeface="Calibri" pitchFamily="34" charset="0"/>
+                <a:ea typeface="Amiri" pitchFamily="2" charset="-78"/>
                 <a:cs typeface="Amiri" pitchFamily="2" charset="-78"/>
               </a:rPr>
               <a:t>حِصَّتَيْنِ</a:t>
@@ -4940,11 +4976,12 @@
               <a:buNone/>
             </a:pPr>
             <a:r>
-              <a:rPr lang="en-US" sz="950" b="1" dirty="0">
+              <a:rPr lang="ar-SA" sz="950" b="1" dirty="0">
                 <a:solidFill>
                   <a:srgbClr val="FFFFFF"/>
                 </a:solidFill>
                 <a:latin typeface="Calibri" pitchFamily="34" charset="0"/>
+                <a:ea typeface="Amiri" pitchFamily="2" charset="-78"/>
                 <a:cs typeface="Amiri" pitchFamily="2" charset="-78"/>
               </a:rPr>
               <a:t>لٰكِنَّ</a:t>
@@ -5005,11 +5042,12 @@
               <a:buNone/>
             </a:pPr>
             <a:r>
-              <a:rPr lang="en-US" sz="950" b="1" dirty="0">
+              <a:rPr lang="ar-SA" sz="950" b="1" dirty="0">
                 <a:solidFill>
                   <a:srgbClr val="FFFFFF"/>
                 </a:solidFill>
                 <a:latin typeface="Calibri" pitchFamily="34" charset="0"/>
+                <a:ea typeface="Amiri" pitchFamily="2" charset="-78"/>
                 <a:cs typeface="Amiri" pitchFamily="2" charset="-78"/>
               </a:rPr>
               <a:t>أُسْبُوعَيْنِ</a:t>
@@ -5143,6 +5181,7 @@
                   <a:srgbClr val="D4AF37"/>
                 </a:solidFill>
                 <a:latin typeface="Amiri" pitchFamily="2" charset="-78"/>
+                <a:ea typeface="Amiri" pitchFamily="2" charset="-78"/>
                 <a:cs typeface="Amiri" pitchFamily="2" charset="-78"/>
               </a:rPr>
               <a:t>م</a:t>
@@ -5463,6 +5502,7 @@
                   <a:srgbClr val="8A6D1E"/>
                 </a:solidFill>
                 <a:latin typeface="Amiri" pitchFamily="2" charset="-78"/>
+                <a:ea typeface="Amiri" pitchFamily="2" charset="-78"/>
                 <a:cs typeface="Amiri" pitchFamily="2" charset="-78"/>
               </a:rPr>
               <a:t>اخْتَرْ عُنْوَانًا وَاحِدًا</a:t>
@@ -5743,6 +5783,7 @@
                   <a:srgbClr val="1B3B6F"/>
                 </a:solidFill>
                 <a:latin typeface="Amiri" pitchFamily="2" charset="-78"/>
+                <a:ea typeface="Amiri" pitchFamily="2" charset="-78"/>
                 <a:cs typeface="Amiri" pitchFamily="2" charset="-78"/>
               </a:rPr>
               <a:t>أُسْبُوعٌ فِي مَدْرَسَتِي</a:t>
@@ -5781,6 +5822,7 @@
                   <a:srgbClr val="1B3B6F"/>
                 </a:solidFill>
                 <a:latin typeface="Amiri" pitchFamily="2" charset="-78"/>
+                <a:ea typeface="Amiri" pitchFamily="2" charset="-78"/>
                 <a:cs typeface="Amiri" pitchFamily="2" charset="-78"/>
               </a:rPr>
               <a:t>(أ)</a:t>
@@ -5887,6 +5929,7 @@
                   <a:srgbClr val="1B3B6F"/>
                 </a:solidFill>
                 <a:latin typeface="Amiri" pitchFamily="2" charset="-78"/>
+                <a:ea typeface="Amiri" pitchFamily="2" charset="-78"/>
                 <a:cs typeface="Amiri" pitchFamily="2" charset="-78"/>
               </a:rPr>
               <a:t>صِفْ أُسْبُوعَكَ الدِّرَاسِيَّ · مَا أَصْعَبُ يَوْمٍ وَلِمَاذَا؟ · صِفْ يَوْمًا مُمَيَّزًا فِي المَدْرَسَةِ هٰذِهِ السَّنَةَ · مَا خُطَطُكَ لِلْفَصْلِ القَادِمِ؟</a:t>
@@ -6018,6 +6061,7 @@
                   <a:srgbClr val="1B3B6F"/>
                 </a:solidFill>
                 <a:latin typeface="Amiri" pitchFamily="2" charset="-78"/>
+                <a:ea typeface="Amiri" pitchFamily="2" charset="-78"/>
                 <a:cs typeface="Amiri" pitchFamily="2" charset="-78"/>
               </a:rPr>
               <a:t>تَارِيخٌ مُهِمٌّ فِي حَيَاتِي</a:t>
@@ -6056,6 +6100,7 @@
                   <a:srgbClr val="1B3B6F"/>
                 </a:solidFill>
                 <a:latin typeface="Amiri" pitchFamily="2" charset="-78"/>
+                <a:ea typeface="Amiri" pitchFamily="2" charset="-78"/>
                 <a:cs typeface="Amiri" pitchFamily="2" charset="-78"/>
               </a:rPr>
               <a:t>(ب)</a:t>
@@ -6162,6 +6207,7 @@
                   <a:srgbClr val="1B3B6F"/>
                 </a:solidFill>
                 <a:latin typeface="Amiri" pitchFamily="2" charset="-78"/>
+                <a:ea typeface="Amiri" pitchFamily="2" charset="-78"/>
                 <a:cs typeface="Amiri" pitchFamily="2" charset="-78"/>
               </a:rPr>
               <a:t>مَا التَّارِيخُ، وَلِمَاذَا هُوَ مُهِمٌّ؟ · كَيْفَ احْتَفَلْتَ بِهِ آخِرَ مَرَّةٍ؟ · مَا رَأْيُكَ فِي هٰذِهِ المُنَاسَبَاتِ؟ · كَيْفَ سَتَحْتَفِلُ بِهِ فِي المُسْتَقْبَلِ؟</a:t>
@@ -6361,6 +6407,7 @@
                   <a:srgbClr val="D4AF37"/>
                 </a:solidFill>
                 <a:latin typeface="Amiri" pitchFamily="2" charset="-78"/>
+                <a:ea typeface="Amiri" pitchFamily="2" charset="-78"/>
                 <a:cs typeface="Amiri" pitchFamily="2" charset="-78"/>
               </a:rPr>
               <a:t>م</a:t>
@@ -6681,6 +6728,7 @@
                   <a:srgbClr val="8A6D1E"/>
                 </a:solidFill>
                 <a:latin typeface="Amiri" pitchFamily="2" charset="-78"/>
+                <a:ea typeface="Amiri" pitchFamily="2" charset="-78"/>
                 <a:cs typeface="Amiri" pitchFamily="2" charset="-78"/>
               </a:rPr>
               <a:t>خُطَّةُ الكِتَابَةِ</a:t>
@@ -7305,6 +7353,7 @@
                   <a:srgbClr val="1B3B6F"/>
                 </a:solidFill>
                 <a:latin typeface="Amiri" pitchFamily="2" charset="-78"/>
+                <a:ea typeface="Amiri" pitchFamily="2" charset="-78"/>
                 <a:cs typeface="Amiri" pitchFamily="2" charset="-78"/>
               </a:rPr>
               <a:t>يَبْدَأُ اليَوْمُ فِي الثَّامِنَةِ وَالنِّصْفِ.</a:t>
@@ -7404,6 +7453,7 @@
                   <a:srgbClr val="1B3B6F"/>
                 </a:solidFill>
                 <a:latin typeface="Amiri" pitchFamily="2" charset="-78"/>
+                <a:ea typeface="Amiri" pitchFamily="2" charset="-78"/>
                 <a:cs typeface="Amiri" pitchFamily="2" charset="-78"/>
               </a:rPr>
               <a:t>فِي السَّادِسِ مِنْ أُكْتُوبَرَ ذَهَبْنَا …</a:t>
@@ -7503,6 +7553,7 @@
                   <a:srgbClr val="1B3B6F"/>
                 </a:solidFill>
                 <a:latin typeface="Amiri" pitchFamily="2" charset="-78"/>
+                <a:ea typeface="Amiri" pitchFamily="2" charset="-78"/>
                 <a:cs typeface="Amiri" pitchFamily="2" charset="-78"/>
               </a:rPr>
               <a:t>فِي الفَصْلِ القَادِمِ سَأُنَظِّمُ وَقْتِي.</a:t>
@@ -7664,6 +7715,7 @@
                   <a:srgbClr val="1F2A37"/>
                 </a:solidFill>
                 <a:latin typeface="Amiri" pitchFamily="2" charset="-78"/>
+                <a:ea typeface="Amiri" pitchFamily="2" charset="-78"/>
                 <a:cs typeface="Amiri" pitchFamily="2" charset="-78"/>
               </a:rPr>
               <a:t>أ</a:t>
@@ -7690,6 +7742,7 @@
                   <a:srgbClr val="1F2A37"/>
                 </a:solidFill>
                 <a:latin typeface="Amiri" pitchFamily="2" charset="-78"/>
+                <a:ea typeface="Amiri" pitchFamily="2" charset="-78"/>
                 <a:cs typeface="Amiri" pitchFamily="2" charset="-78"/>
               </a:rPr>
               <a:t>ب</a:t>
@@ -7836,6 +7889,7 @@
                   <a:srgbClr val="D4AF37"/>
                 </a:solidFill>
                 <a:latin typeface="Amiri" pitchFamily="2" charset="-78"/>
+                <a:ea typeface="Amiri" pitchFamily="2" charset="-78"/>
                 <a:cs typeface="Amiri" pitchFamily="2" charset="-78"/>
               </a:rPr>
               <a:t>م</a:t>
@@ -8093,6 +8147,7 @@
                   <a:srgbClr val="8A6D1E"/>
                 </a:solidFill>
                 <a:latin typeface="Amiri" pitchFamily="2" charset="-78"/>
+                <a:ea typeface="Amiri" pitchFamily="2" charset="-78"/>
                 <a:cs typeface="Amiri" pitchFamily="2" charset="-78"/>
               </a:rPr>
               <a:t>أ</a:t>
@@ -8157,6 +8212,7 @@
                   <a:srgbClr val="1B3B6F"/>
                 </a:solidFill>
                 <a:latin typeface="Amiri" pitchFamily="2" charset="-78"/>
+                <a:ea typeface="Amiri" pitchFamily="2" charset="-78"/>
                 <a:cs typeface="Amiri" pitchFamily="2" charset="-78"/>
               </a:rPr>
               <a:t>أ</a:t>
@@ -8208,6 +8264,7 @@
                   <a:srgbClr val="8A6D1E"/>
                 </a:solidFill>
                 <a:latin typeface="Amiri" pitchFamily="2" charset="-78"/>
+                <a:ea typeface="Amiri" pitchFamily="2" charset="-78"/>
                 <a:cs typeface="Amiri" pitchFamily="2" charset="-78"/>
               </a:rPr>
               <a:t>نَمُوذَجُ الإِجَابَةِ</a:t>
@@ -8321,6 +8378,7 @@
                   <a:srgbClr val="1F2A37"/>
                 </a:solidFill>
                 <a:latin typeface="Amiri" pitchFamily="2" charset="-78"/>
+                <a:ea typeface="Amiri" pitchFamily="2" charset="-78"/>
                 <a:cs typeface="Amiri" pitchFamily="2" charset="-78"/>
               </a:rPr>
               <a:t>أَدْرُسُ فِي مَدْرَسَةٍ كَبِيرَةٍ فِي لَنْدَنَ. أَذْهَبُ إِلَى المَدْرَسَةِ خَمْسَةَ أَيَّامٍ فِي الأُسْبُوعِ، مِنَ الإِثْنَيْنِ إِلَى الجُمُعَةِ. يَبْدَأُ اليَوْمُ فِي السَّاعَةِ الثَّامِنَةِ وَالنِّصْفِ، وَيَنْتَهِي فِي السَّاعَةِ الثَّالِثَةِ. عِنْدِي سِتُّ حِصَصٍ كُلَّ يَوْمٍ. يَوْمَ الإِثْنَيْنِ أَدْرُسُ الرِّيَاضِيَّاتِ وَالعَرَبِيَّةَ، وَيَوْمَ الأَرْبِعَاءِ عِنْدِي الرِّيَاضَةُ وَالفَنُّ. فِي الاسْتِرَاحَةِ أَتَنَاوَلُ الغَدَاءَ مَعَ أَصْدِقَائِي.</a:t>
@@ -8340,6 +8398,7 @@
                   <a:srgbClr val="1F2A37"/>
                 </a:solidFill>
                 <a:latin typeface="Amiri" pitchFamily="2" charset="-78"/>
+                <a:ea typeface="Amiri" pitchFamily="2" charset="-78"/>
                 <a:cs typeface="Amiri" pitchFamily="2" charset="-78"/>
               </a:rPr>
               <a:t>اليَوْمُ الأَصْعَبُ هُوَ الثُّلَاثَاءُ، لِأَنَّ عِنْدِي امْتِحَانًا قَصِيرًا كُلَّ أُسْبُوعٍ، وَأَرْجِعُ إِلَى البَيْتِ مُتَأَخِّرًا.</a:t>
@@ -8359,6 +8418,7 @@
                   <a:srgbClr val="1F2A37"/>
                 </a:solidFill>
                 <a:latin typeface="Amiri" pitchFamily="2" charset="-78"/>
+                <a:ea typeface="Amiri" pitchFamily="2" charset="-78"/>
                 <a:cs typeface="Amiri" pitchFamily="2" charset="-78"/>
               </a:rPr>
               <a:t>فِي شَهْرِ أُكْتُوبَرَ ذَهَبْنَا فِي رِحْلَةٍ مَدْرَسِيَّةٍ إِلَى المَتْحَفِ. كَانَ يَوْمًا جَمِيلًا، وَتَعَلَّمْتُ أَشْيَاءَ كَثِيرَةً، وَأَكَلْتُ مَعَ أَصْدِقَائِي فِي الحَدِيقَةِ، ثُمَّ رَجَعْنَا إِلَى المَدْرَسَةِ فِي السَّاعَةِ الثَّالِثَةِ.</a:t>
@@ -8378,6 +8438,7 @@
                   <a:srgbClr val="1F2A37"/>
                 </a:solidFill>
                 <a:latin typeface="Amiri" pitchFamily="2" charset="-78"/>
+                <a:ea typeface="Amiri" pitchFamily="2" charset="-78"/>
                 <a:cs typeface="Amiri" pitchFamily="2" charset="-78"/>
               </a:rPr>
               <a:t>فِي الفَصْلِ القَادِمِ سَأُرَاجِعُ دُرُوسِي كُلَّ يَوْمٍ، وَسَأَشْتَرِكُ فِي نَادِي الشِّطْرَنْجِ يَوْمَ الخَمِيسِ، وَسَأَنَامُ مُبَكِّرًا قَبْلَ الامْتِحَانَاتِ. أُحِبُّ مَدْرَسَتِي كَثِيرًا لِأَنَّ المُعَلِّمِينَ لُطَفَاءُ وَالطُّلَّابَ أَصْدِقَائِي.</a:t>
@@ -8541,11 +8602,12 @@
               <a:buNone/>
             </a:pPr>
             <a:r>
-              <a:rPr lang="en-US" sz="950" b="1" dirty="0">
+              <a:rPr lang="ar-SA" sz="950" b="1" dirty="0">
                 <a:solidFill>
                   <a:srgbClr val="FFFFFF"/>
                 </a:solidFill>
                 <a:latin typeface="Calibri" pitchFamily="34" charset="0"/>
+                <a:ea typeface="Amiri" pitchFamily="2" charset="-78"/>
                 <a:cs typeface="Amiri" pitchFamily="2" charset="-78"/>
               </a:rPr>
               <a:t>خَمْسَةَ أَيَّامٍ</a:t>
@@ -8606,11 +8668,12 @@
               <a:buNone/>
             </a:pPr>
             <a:r>
-              <a:rPr lang="en-US" sz="950" b="1" dirty="0">
+              <a:rPr lang="ar-SA" sz="950" b="1" dirty="0">
                 <a:solidFill>
                   <a:srgbClr val="FFFFFF"/>
                 </a:solidFill>
                 <a:latin typeface="Calibri" pitchFamily="34" charset="0"/>
+                <a:ea typeface="Amiri" pitchFamily="2" charset="-78"/>
                 <a:cs typeface="Amiri" pitchFamily="2" charset="-78"/>
               </a:rPr>
               <a:t>اليَوْمُ الأَصْعَبُ</a:t>
@@ -8671,11 +8734,12 @@
               <a:buNone/>
             </a:pPr>
             <a:r>
-              <a:rPr lang="en-US" sz="950" b="1" dirty="0">
+              <a:rPr lang="ar-SA" sz="950" b="1" dirty="0">
                 <a:solidFill>
                   <a:srgbClr val="FFFFFF"/>
                 </a:solidFill>
                 <a:latin typeface="Calibri" pitchFamily="34" charset="0"/>
+                <a:ea typeface="Amiri" pitchFamily="2" charset="-78"/>
                 <a:cs typeface="Amiri" pitchFamily="2" charset="-78"/>
               </a:rPr>
               <a:t>ذَهَبْنَا</a:t>
@@ -8736,11 +8800,12 @@
               <a:buNone/>
             </a:pPr>
             <a:r>
-              <a:rPr lang="en-US" sz="950" b="1" dirty="0">
+              <a:rPr lang="ar-SA" sz="950" b="1" dirty="0">
                 <a:solidFill>
                   <a:srgbClr val="FFFFFF"/>
                 </a:solidFill>
                 <a:latin typeface="Calibri" pitchFamily="34" charset="0"/>
+                <a:ea typeface="Amiri" pitchFamily="2" charset="-78"/>
                 <a:cs typeface="Amiri" pitchFamily="2" charset="-78"/>
               </a:rPr>
               <a:t>سَأَشْتَرِكُ</a:t>
@@ -8874,6 +8939,7 @@
                   <a:srgbClr val="D4AF37"/>
                 </a:solidFill>
                 <a:latin typeface="Amiri" pitchFamily="2" charset="-78"/>
+                <a:ea typeface="Amiri" pitchFamily="2" charset="-78"/>
                 <a:cs typeface="Amiri" pitchFamily="2" charset="-78"/>
               </a:rPr>
               <a:t>م</a:t>
@@ -9131,6 +9197,7 @@
                   <a:srgbClr val="8A6D1E"/>
                 </a:solidFill>
                 <a:latin typeface="Amiri" pitchFamily="2" charset="-78"/>
+                <a:ea typeface="Amiri" pitchFamily="2" charset="-78"/>
                 <a:cs typeface="Amiri" pitchFamily="2" charset="-78"/>
               </a:rPr>
               <a:t>أ</a:t>
@@ -9195,6 +9262,7 @@
                   <a:srgbClr val="1B3B6F"/>
                 </a:solidFill>
                 <a:latin typeface="Amiri" pitchFamily="2" charset="-78"/>
+                <a:ea typeface="Amiri" pitchFamily="2" charset="-78"/>
                 <a:cs typeface="Amiri" pitchFamily="2" charset="-78"/>
               </a:rPr>
               <a:t>أ</a:t>
@@ -9246,6 +9314,7 @@
                   <a:srgbClr val="8A6D1E"/>
                 </a:solidFill>
                 <a:latin typeface="Amiri" pitchFamily="2" charset="-78"/>
+                <a:ea typeface="Amiri" pitchFamily="2" charset="-78"/>
                 <a:cs typeface="Amiri" pitchFamily="2" charset="-78"/>
               </a:rPr>
               <a:t>نَمُوذَجُ الإِجَابَةِ</a:t>
@@ -9359,6 +9428,7 @@
                   <a:srgbClr val="1F2A37"/>
                 </a:solidFill>
                 <a:latin typeface="Amiri" pitchFamily="2" charset="-78"/>
+                <a:ea typeface="Amiri" pitchFamily="2" charset="-78"/>
                 <a:cs typeface="Amiri" pitchFamily="2" charset="-78"/>
               </a:rPr>
               <a:t>أَدْرُسُ فِي مَدْرَسَةٍ ثَانَوِيَّةٍ، وَيَمْتَدُّ أُسْبُوعِي الدِّرَاسِيُّ مِنَ الإِثْنَيْنِ إِلَى الجُمُعَةِ. يَبْدَأُ اليَوْمُ فِي الثَّامِنَةِ وَالنِّصْفِ بِالتَّسْجِيلِ، ثُمَّ نَدْرُسُ سِتَّ حِصَصٍ، مُدَّةُ كُلٍّ مِنْهَا خَمْسُونَ دَقِيقَةً، وَيَنْتَهِي فِي الثَّالِثَةِ وَالرُّبْعِ. وَفِي الاسْتِرَاحَةِ الطَّوِيلَةِ نَتَنَاوَلُ الغَدَاءَ وَنَلْعَبُ فِي السَّاحَةِ نِصْفَ سَاعَةٍ.</a:t>
@@ -9378,6 +9448,7 @@
                   <a:srgbClr val="1F2A37"/>
                 </a:solidFill>
                 <a:latin typeface="Amiri" pitchFamily="2" charset="-78"/>
+                <a:ea typeface="Amiri" pitchFamily="2" charset="-78"/>
                 <a:cs typeface="Amiri" pitchFamily="2" charset="-78"/>
               </a:rPr>
               <a:t>فِي رَأْيِي، أَصْعَبُ يَوْمٍ هُوَ الثُّلَاثَاءُ، لِأَنَّ الحِصَصَ الأَرْبَعَ الأُولَى عِلْمِيَّةٌ، وَبَعْدَهَا أَبْقَى فِي نَادِي الرُّوبُوتَاتِ حَتَّى الخَامِسَةِ، فَأَشْعُرُ بِالتَّعَبِ فِي المَسَاءِ. أَمَّا الجُمُعَةُ فَهِيَ أَسْهَلُ يَوْمٍ، لِأَنَّنَا نَخْرُجُ مُبَكِّرًا.</a:t>
@@ -9397,6 +9468,7 @@
                   <a:srgbClr val="1F2A37"/>
                 </a:solidFill>
                 <a:latin typeface="Amiri" pitchFamily="2" charset="-78"/>
+                <a:ea typeface="Amiri" pitchFamily="2" charset="-78"/>
                 <a:cs typeface="Amiri" pitchFamily="2" charset="-78"/>
               </a:rPr>
               <a:t>فِي السَّادِسِ مِنْ أُكْتُوبَرَ ذَهَبْنَا فِي رِحْلَةٍ إِلَى مَتْحَفِ العُلُومِ؛ شَاهَدْنَا تَجَارِبَ مُدْهِشَةً، وَكَتَبْتُ تَقْرِيرًا عَنْهَا فِي اليَوْمِ التَّالِي، فَحَصَلْتُ عَلَى دَرَجَةٍ مُمْتَازَةٍ. كَانَ ذٰلِكَ اليَوْمُ مِنْ أَجْمَلِ أَيَّامِ السَّنَةِ.</a:t>
@@ -9416,6 +9488,7 @@
                   <a:srgbClr val="1F2A37"/>
                 </a:solidFill>
                 <a:latin typeface="Amiri" pitchFamily="2" charset="-78"/>
+                <a:ea typeface="Amiri" pitchFamily="2" charset="-78"/>
                 <a:cs typeface="Amiri" pitchFamily="2" charset="-78"/>
               </a:rPr>
               <a:t>فِي الفَصْلِ القَادِمِ سَأُنَظِّمُ وَقْتِي أَفْضَلَ، وَسَأَكْتُبُ مَوَاعِيدَ الوَاجِبَاتِ وَالامْتِحَانَاتِ فِي تَقْوِيمِي، لِكَيْ لَا أَنْسَى شَيْئًا، وَسَأُرَاجِعُ كُلَّ مَادَّةٍ مَرَّتَيْنِ فِي الأُسْبُوعِ. وَلَوْ كَانَ القَرَارُ بِيَدِي، لَجَعَلْتُ يَوْمَ الأَرْبِعَاءِ نِصْفَ يَوْمٍ لِلرَّاحَةِ وَالأَنْشِطَةِ!</a:t>
@@ -9514,11 +9587,12 @@
               <a:buNone/>
             </a:pPr>
             <a:r>
-              <a:rPr lang="en-US" sz="950" b="1" dirty="0">
+              <a:rPr lang="ar-SA" sz="950" b="1" dirty="0">
                 <a:solidFill>
                   <a:srgbClr val="FFFFFF"/>
                 </a:solidFill>
                 <a:latin typeface="Calibri" pitchFamily="34" charset="0"/>
+                <a:ea typeface="Amiri" pitchFamily="2" charset="-78"/>
                 <a:cs typeface="Amiri" pitchFamily="2" charset="-78"/>
               </a:rPr>
               <a:t>مُدَّةُ كُلٍّ مِنْهَا</a:t>
@@ -9579,11 +9653,12 @@
               <a:buNone/>
             </a:pPr>
             <a:r>
-              <a:rPr lang="en-US" sz="950" b="1" dirty="0">
+              <a:rPr lang="ar-SA" sz="950" b="1" dirty="0">
                 <a:solidFill>
                   <a:srgbClr val="FFFFFF"/>
                 </a:solidFill>
                 <a:latin typeface="Calibri" pitchFamily="34" charset="0"/>
+                <a:ea typeface="Amiri" pitchFamily="2" charset="-78"/>
                 <a:cs typeface="Amiri" pitchFamily="2" charset="-78"/>
               </a:rPr>
               <a:t>أَمَّا الجُمُعَةُ فَهِيَ</a:t>
@@ -9644,11 +9719,12 @@
               <a:buNone/>
             </a:pPr>
             <a:r>
-              <a:rPr lang="en-US" sz="950" b="1" dirty="0">
+              <a:rPr lang="ar-SA" sz="950" b="1" dirty="0">
                 <a:solidFill>
                   <a:srgbClr val="FFFFFF"/>
                 </a:solidFill>
                 <a:latin typeface="Calibri" pitchFamily="34" charset="0"/>
+                <a:ea typeface="Amiri" pitchFamily="2" charset="-78"/>
                 <a:cs typeface="Amiri" pitchFamily="2" charset="-78"/>
               </a:rPr>
               <a:t>لِكَيْ لَا أَنْسَى</a:t>
@@ -9709,11 +9785,12 @@
               <a:buNone/>
             </a:pPr>
             <a:r>
-              <a:rPr lang="en-US" sz="950" b="1" dirty="0">
+              <a:rPr lang="ar-SA" sz="950" b="1" dirty="0">
                 <a:solidFill>
                   <a:srgbClr val="FFFFFF"/>
                 </a:solidFill>
                 <a:latin typeface="Calibri" pitchFamily="34" charset="0"/>
+                <a:ea typeface="Amiri" pitchFamily="2" charset="-78"/>
                 <a:cs typeface="Amiri" pitchFamily="2" charset="-78"/>
               </a:rPr>
               <a:t>لَوْ كَانَ … لَجَعَلْتُ</a:t>
@@ -9847,6 +9924,7 @@
                   <a:srgbClr val="D4AF37"/>
                 </a:solidFill>
                 <a:latin typeface="Amiri" pitchFamily="2" charset="-78"/>
+                <a:ea typeface="Amiri" pitchFamily="2" charset="-78"/>
                 <a:cs typeface="Amiri" pitchFamily="2" charset="-78"/>
               </a:rPr>
               <a:t>م</a:t>
@@ -10104,6 +10182,7 @@
                   <a:srgbClr val="8A6D1E"/>
                 </a:solidFill>
                 <a:latin typeface="Amiri" pitchFamily="2" charset="-78"/>
+                <a:ea typeface="Amiri" pitchFamily="2" charset="-78"/>
                 <a:cs typeface="Amiri" pitchFamily="2" charset="-78"/>
               </a:rPr>
               <a:t>ب</a:t>
@@ -10168,6 +10247,7 @@
                   <a:srgbClr val="1B3B6F"/>
                 </a:solidFill>
                 <a:latin typeface="Amiri" pitchFamily="2" charset="-78"/>
+                <a:ea typeface="Amiri" pitchFamily="2" charset="-78"/>
                 <a:cs typeface="Amiri" pitchFamily="2" charset="-78"/>
               </a:rPr>
               <a:t>ب</a:t>
@@ -10219,6 +10299,7 @@
                   <a:srgbClr val="8A6D1E"/>
                 </a:solidFill>
                 <a:latin typeface="Amiri" pitchFamily="2" charset="-78"/>
+                <a:ea typeface="Amiri" pitchFamily="2" charset="-78"/>
                 <a:cs typeface="Amiri" pitchFamily="2" charset="-78"/>
               </a:rPr>
               <a:t>نَمُوذَجُ الإِجَابَةِ</a:t>
@@ -10332,6 +10413,7 @@
                   <a:srgbClr val="1F2A37"/>
                 </a:solidFill>
                 <a:latin typeface="Amiri" pitchFamily="2" charset="-78"/>
+                <a:ea typeface="Amiri" pitchFamily="2" charset="-78"/>
                 <a:cs typeface="Amiri" pitchFamily="2" charset="-78"/>
               </a:rPr>
               <a:t>أَهَمُّ تَارِيخٍ فِي حَيَاتِي هُوَ الخَامِسَ عَشَرَ مِنْ مَارِسَ، لِأَنَّهُ يَوْمُ مِيلَادِ أُخْتِي الصَّغِيرَةِ سَلْمَى. وُلِدَتْ فِي مُسْتَشْفًى قَرِيبٍ مِنْ بَيْتِنَا فِي السَّاعَةِ الثَّالِثَةِ فَجْرًا، وَكُنْتُ وَقْتَهَا فِي السَّابِعَةِ مِنْ عُمْرِي. قَبْلَ وِلَادَتِهَا كُنْتُ الطِّفْلَ الوَحِيدَ فِي البَيْتِ، أَمَّا الآنَ فَعِنْدِي صَدِيقَةٌ تَلْعَبُ مَعِي كُلَّ يَوْمٍ.</a:t>
@@ -10351,6 +10433,7 @@
                   <a:srgbClr val="1F2A37"/>
                 </a:solidFill>
                 <a:latin typeface="Amiri" pitchFamily="2" charset="-78"/>
+                <a:ea typeface="Amiri" pitchFamily="2" charset="-78"/>
                 <a:cs typeface="Amiri" pitchFamily="2" charset="-78"/>
               </a:rPr>
               <a:t>فِي السَّنَةِ المَاضِيَةِ احْتَفَلْنَا بِعِيدِ مِيلَادِهَا يَوْمَ السَّبْتِ؛ زَيَّنَّا البَيْتَ بِالبَالُونَاتِ المُلَوَّنَةِ فِي الصَّبَاحِ، وَجَاءَ أَقَارِبُنَا فِي الرَّابِعَةِ، وَأَكَلْنَا كَعْكَةً كَبِيرَةً، ثُمَّ لَعِبْنَا حَتَّى المَسَاءِ. وَقَدَّمْتُ لَهَا هَدِيَّةً جَمِيلَةً، فَفَرِحَتْ كَثِيرًا.</a:t>
@@ -10370,6 +10453,7 @@
                   <a:srgbClr val="1F2A37"/>
                 </a:solidFill>
                 <a:latin typeface="Amiri" pitchFamily="2" charset="-78"/>
+                <a:ea typeface="Amiri" pitchFamily="2" charset="-78"/>
                 <a:cs typeface="Amiri" pitchFamily="2" charset="-78"/>
               </a:rPr>
               <a:t>فِي رَأْيِي، هٰذِهِ المُنَاسَبَاتُ مُهِمَّةٌ لِأَنَّهَا تَجْمَعُ الأُسْرَةَ، غَيْرَ أَنَّ بَعْضَ النَّاسِ يُنْفِقُونَ أَمْوَالًا كَثِيرَةً عَلَيْهَا، وَهٰذَا غَيْرُ ضَرُورِيٍّ؛ فَالأَهَمُّ مِنَ الهَدَايَا هُوَ الوَقْتُ الَّذِي نَقْضِيهِ مَعًا.</a:t>
@@ -10389,6 +10473,7 @@
                   <a:srgbClr val="1F2A37"/>
                 </a:solidFill>
                 <a:latin typeface="Amiri" pitchFamily="2" charset="-78"/>
+                <a:ea typeface="Amiri" pitchFamily="2" charset="-78"/>
                 <a:cs typeface="Amiri" pitchFamily="2" charset="-78"/>
               </a:rPr>
               <a:t>فِي السَّنَةِ القَادِمَةِ سَأُخَطِّطُ لِحَفْلَةٍ بَسِيطَةٍ فِي الحَدِيقَةِ، وَسَأَدْعُو صَدِيقَاتِهَا مِنَ المَدْرَسَةِ، وَسَأَصْنَعُ لَهَا بِطَاقَةً بِيَدِي. وَلَوْ كَانَ عِنْدِي مَالٌ كَافٍ، لَأَخَذْتُهَا إِلَى حَدِيقَةِ الحَيَوَانَاتِ، لِأَنَّهَا تُحِبُّ الحَيَوَانَاتِ كَثِيرًا.</a:t>
@@ -10487,11 +10572,12 @@
               <a:buNone/>
             </a:pPr>
             <a:r>
-              <a:rPr lang="en-US" sz="950" b="1" dirty="0">
+              <a:rPr lang="ar-SA" sz="950" b="1" dirty="0">
                 <a:solidFill>
                   <a:srgbClr val="FFFFFF"/>
                 </a:solidFill>
                 <a:latin typeface="Calibri" pitchFamily="34" charset="0"/>
+                <a:ea typeface="Amiri" pitchFamily="2" charset="-78"/>
                 <a:cs typeface="Amiri" pitchFamily="2" charset="-78"/>
               </a:rPr>
               <a:t>الخَامِسَ عَشَرَ مِنْ مَارِسَ</a:t>
@@ -10552,11 +10638,12 @@
               <a:buNone/>
             </a:pPr>
             <a:r>
-              <a:rPr lang="en-US" sz="950" b="1" dirty="0">
+              <a:rPr lang="ar-SA" sz="950" b="1" dirty="0">
                 <a:solidFill>
                   <a:srgbClr val="FFFFFF"/>
                 </a:solidFill>
                 <a:latin typeface="Calibri" pitchFamily="34" charset="0"/>
+                <a:ea typeface="Amiri" pitchFamily="2" charset="-78"/>
                 <a:cs typeface="Amiri" pitchFamily="2" charset="-78"/>
               </a:rPr>
               <a:t>أَمَّا الآنَ فَعِنْدِي</a:t>
@@ -10617,11 +10704,12 @@
               <a:buNone/>
             </a:pPr>
             <a:r>
-              <a:rPr lang="en-US" sz="950" b="1" dirty="0">
+              <a:rPr lang="ar-SA" sz="950" b="1" dirty="0">
                 <a:solidFill>
                   <a:srgbClr val="FFFFFF"/>
                 </a:solidFill>
                 <a:latin typeface="Calibri" pitchFamily="34" charset="0"/>
+                <a:ea typeface="Amiri" pitchFamily="2" charset="-78"/>
                 <a:cs typeface="Amiri" pitchFamily="2" charset="-78"/>
               </a:rPr>
               <a:t>غَيْرَ أَنَّ</a:t>
@@ -10682,11 +10770,12 @@
               <a:buNone/>
             </a:pPr>
             <a:r>
-              <a:rPr lang="en-US" sz="950" b="1" dirty="0">
+              <a:rPr lang="ar-SA" sz="950" b="1" dirty="0">
                 <a:solidFill>
                   <a:srgbClr val="FFFFFF"/>
                 </a:solidFill>
                 <a:latin typeface="Calibri" pitchFamily="34" charset="0"/>
+                <a:ea typeface="Amiri" pitchFamily="2" charset="-78"/>
                 <a:cs typeface="Amiri" pitchFamily="2" charset="-78"/>
               </a:rPr>
               <a:t>لَوْ … لَأَخَذْتُهَا</a:t>
@@ -10820,6 +10909,7 @@
                   <a:srgbClr val="D4AF37"/>
                 </a:solidFill>
                 <a:latin typeface="Amiri" pitchFamily="2" charset="-78"/>
+                <a:ea typeface="Amiri" pitchFamily="2" charset="-78"/>
                 <a:cs typeface="Amiri" pitchFamily="2" charset="-78"/>
               </a:rPr>
               <a:t>م</a:t>
@@ -11140,6 +11230,7 @@
                   <a:srgbClr val="8A6D1E"/>
                 </a:solidFill>
                 <a:latin typeface="Amiri" pitchFamily="2" charset="-78"/>
+                <a:ea typeface="Amiri" pitchFamily="2" charset="-78"/>
                 <a:cs typeface="Amiri" pitchFamily="2" charset="-78"/>
               </a:rPr>
               <a:t>قَيِّمْ عَمَلَكَ</a:t>
@@ -12384,6 +12475,7 @@
                   <a:srgbClr val="FFFFFF"/>
                 </a:solidFill>
                 <a:latin typeface="Amiri" pitchFamily="2" charset="-78"/>
+                <a:ea typeface="Amiri" pitchFamily="2" charset="-78"/>
                 <a:cs typeface="Amiri" pitchFamily="2" charset="-78"/>
               </a:rPr>
               <a:t>أَحْسَنْتُمْ! إِلَى اللِّقَاءِ</a:t>
@@ -12536,6 +12628,7 @@
                   <a:srgbClr val="D4AF37"/>
                 </a:solidFill>
                 <a:latin typeface="Amiri" pitchFamily="2" charset="-78"/>
+                <a:ea typeface="Amiri" pitchFamily="2" charset="-78"/>
                 <a:cs typeface="Amiri" pitchFamily="2" charset="-78"/>
               </a:rPr>
               <a:t>وَرْشَةُ التَّدْرِيبِ</a:t>
@@ -12669,6 +12762,7 @@
                   <a:srgbClr val="D4AF37"/>
                 </a:solidFill>
                 <a:latin typeface="Amiri" pitchFamily="2" charset="-78"/>
+                <a:ea typeface="Amiri" pitchFamily="2" charset="-78"/>
                 <a:cs typeface="Amiri" pitchFamily="2" charset="-78"/>
               </a:rPr>
               <a:t>م</a:t>
@@ -12989,6 +13083,7 @@
                   <a:srgbClr val="8A6D1E"/>
                 </a:solidFill>
                 <a:latin typeface="Amiri" pitchFamily="2" charset="-78"/>
+                <a:ea typeface="Amiri" pitchFamily="2" charset="-78"/>
                 <a:cs typeface="Amiri" pitchFamily="2" charset="-78"/>
               </a:rPr>
               <a:t>آدَابُ الصَّفِّ</a:t>
@@ -14520,6 +14615,7 @@
                   <a:srgbClr val="D4AF37"/>
                 </a:solidFill>
                 <a:latin typeface="Amiri" pitchFamily="2" charset="-78"/>
+                <a:ea typeface="Amiri" pitchFamily="2" charset="-78"/>
                 <a:cs typeface="Amiri" pitchFamily="2" charset="-78"/>
               </a:rPr>
               <a:t>م</a:t>
@@ -14840,6 +14936,7 @@
                   <a:srgbClr val="8A6D1E"/>
                 </a:solidFill>
                 <a:latin typeface="Amiri" pitchFamily="2" charset="-78"/>
+                <a:ea typeface="Amiri" pitchFamily="2" charset="-78"/>
                 <a:cs typeface="Amiri" pitchFamily="2" charset="-78"/>
               </a:rPr>
               <a:t>خَرِيطَةُ الوَرْشَةِ</a:t>
@@ -15154,6 +15251,7 @@
                   <a:srgbClr val="1B3B6F"/>
                 </a:solidFill>
                 <a:latin typeface="Amiri" pitchFamily="2" charset="-78"/>
+                <a:ea typeface="Amiri" pitchFamily="2" charset="-78"/>
                 <a:cs typeface="Amiri" pitchFamily="2" charset="-78"/>
               </a:rPr>
               <a:t>كَيْفَ</a:t>
@@ -15430,6 +15528,7 @@
                   <a:srgbClr val="1E6B52"/>
                 </a:solidFill>
                 <a:latin typeface="Amiri" pitchFamily="2" charset="-78"/>
+                <a:ea typeface="Amiri" pitchFamily="2" charset="-78"/>
                 <a:cs typeface="Amiri" pitchFamily="2" charset="-78"/>
               </a:rPr>
               <a:t>الاسْتِمَارَةُ</a:t>
@@ -15706,6 +15805,7 @@
                   <a:srgbClr val="1E6B52"/>
                 </a:solidFill>
                 <a:latin typeface="Amiri" pitchFamily="2" charset="-78"/>
+                <a:ea typeface="Amiri" pitchFamily="2" charset="-78"/>
                 <a:cs typeface="Amiri" pitchFamily="2" charset="-78"/>
               </a:rPr>
               <a:t>الرِّسَالَةُ</a:t>
@@ -15982,6 +16082,7 @@
                   <a:srgbClr val="1E6B52"/>
                 </a:solidFill>
                 <a:latin typeface="Amiri" pitchFamily="2" charset="-78"/>
+                <a:ea typeface="Amiri" pitchFamily="2" charset="-78"/>
                 <a:cs typeface="Amiri" pitchFamily="2" charset="-78"/>
               </a:rPr>
               <a:t>المَقَالُ</a:t>
@@ -16258,6 +16359,7 @@
                   <a:srgbClr val="8A6D1E"/>
                 </a:solidFill>
                 <a:latin typeface="Amiri" pitchFamily="2" charset="-78"/>
+                <a:ea typeface="Amiri" pitchFamily="2" charset="-78"/>
                 <a:cs typeface="Amiri" pitchFamily="2" charset="-78"/>
               </a:rPr>
               <a:t>قَيِّمْ</a:t>
@@ -16501,6 +16603,7 @@
                   <a:srgbClr val="D4AF37"/>
                 </a:solidFill>
                 <a:latin typeface="Amiri" pitchFamily="2" charset="-78"/>
+                <a:ea typeface="Amiri" pitchFamily="2" charset="-78"/>
                 <a:cs typeface="Amiri" pitchFamily="2" charset="-78"/>
               </a:rPr>
               <a:t>م</a:t>
@@ -16821,6 +16924,7 @@
                   <a:srgbClr val="8A6D1E"/>
                 </a:solidFill>
                 <a:latin typeface="Amiri" pitchFamily="2" charset="-78"/>
+                <a:ea typeface="Amiri" pitchFamily="2" charset="-78"/>
                 <a:cs typeface="Amiri" pitchFamily="2" charset="-78"/>
               </a:rPr>
               <a:t>امْتِحَانُ الكِتَابَةِ</a:t>
@@ -17445,6 +17549,7 @@
                   <a:srgbClr val="1B3B6F"/>
                 </a:solidFill>
                 <a:latin typeface="Amiri" pitchFamily="2" charset="-78"/>
+                <a:ea typeface="Amiri" pitchFamily="2" charset="-78"/>
                 <a:cs typeface="Amiri" pitchFamily="2" charset="-78"/>
               </a:rPr>
               <a:t>فِي الخَامِسِ مِنْ مَايُو</a:t>
@@ -17544,6 +17649,7 @@
                   <a:srgbClr val="1B3B6F"/>
                 </a:solidFill>
                 <a:latin typeface="Amiri" pitchFamily="2" charset="-78"/>
+                <a:ea typeface="Amiri" pitchFamily="2" charset="-78"/>
                 <a:cs typeface="Amiri" pitchFamily="2" charset="-78"/>
               </a:rPr>
               <a:t>مِنَ الإِثْنَيْنِ إِلَى الجُمُعَةِ</a:t>
@@ -17643,6 +17749,7 @@
                   <a:srgbClr val="1B3B6F"/>
                 </a:solidFill>
                 <a:latin typeface="Amiri" pitchFamily="2" charset="-78"/>
+                <a:ea typeface="Amiri" pitchFamily="2" charset="-78"/>
                 <a:cs typeface="Amiri" pitchFamily="2" charset="-78"/>
               </a:rPr>
               <a:t>يَوْمَ السَّبْتِ المَاضِي · الأُسْبُوعَ القَادِمَ</a:t>
@@ -17814,6 +17921,7 @@
                   <a:srgbClr val="D4AF37"/>
                 </a:solidFill>
                 <a:latin typeface="Amiri" pitchFamily="2" charset="-78"/>
+                <a:ea typeface="Amiri" pitchFamily="2" charset="-78"/>
                 <a:cs typeface="Amiri" pitchFamily="2" charset="-78"/>
               </a:rPr>
               <a:t>م</a:t>
@@ -18134,6 +18242,7 @@
                   <a:srgbClr val="8A6D1E"/>
                 </a:solidFill>
                 <a:latin typeface="Amiri" pitchFamily="2" charset="-78"/>
+                <a:ea typeface="Amiri" pitchFamily="2" charset="-78"/>
                 <a:cs typeface="Amiri" pitchFamily="2" charset="-78"/>
               </a:rPr>
               <a:t>اسْتِمَارَةُ الاشْتِرَاكِ فِي النَّادِي</a:t>
@@ -18490,6 +18599,7 @@
                   <a:srgbClr val="1B3B6F"/>
                 </a:solidFill>
                 <a:latin typeface="Amiri" pitchFamily="2" charset="-78"/>
+                <a:ea typeface="Amiri" pitchFamily="2" charset="-78"/>
                 <a:cs typeface="Amiri" pitchFamily="2" charset="-78"/>
               </a:rPr>
               <a:t>الاسْمُ</a:t>
@@ -18734,6 +18844,7 @@
                   <a:srgbClr val="1B3B6F"/>
                 </a:solidFill>
                 <a:latin typeface="Amiri" pitchFamily="2" charset="-78"/>
+                <a:ea typeface="Amiri" pitchFamily="2" charset="-78"/>
                 <a:cs typeface="Amiri" pitchFamily="2" charset="-78"/>
               </a:rPr>
               <a:t>تَارِيخُ المِيلَادِ</a:t>
@@ -18978,6 +19089,7 @@
                   <a:srgbClr val="1B3B6F"/>
                 </a:solidFill>
                 <a:latin typeface="Amiri" pitchFamily="2" charset="-78"/>
+                <a:ea typeface="Amiri" pitchFamily="2" charset="-78"/>
                 <a:cs typeface="Amiri" pitchFamily="2" charset="-78"/>
               </a:rPr>
               <a:t>الصَّفُّ</a:t>
@@ -19222,6 +19334,7 @@
                   <a:srgbClr val="1B3B6F"/>
                 </a:solidFill>
                 <a:latin typeface="Amiri" pitchFamily="2" charset="-78"/>
+                <a:ea typeface="Amiri" pitchFamily="2" charset="-78"/>
                 <a:cs typeface="Amiri" pitchFamily="2" charset="-78"/>
               </a:rPr>
               <a:t>الأَيَّامُ المُنَاسِبَةُ</a:t>
@@ -19466,6 +19579,7 @@
                   <a:srgbClr val="1B3B6F"/>
                 </a:solidFill>
                 <a:latin typeface="Amiri" pitchFamily="2" charset="-78"/>
+                <a:ea typeface="Amiri" pitchFamily="2" charset="-78"/>
                 <a:cs typeface="Amiri" pitchFamily="2" charset="-78"/>
               </a:rPr>
               <a:t>الوَقْتُ المُنَاسِبُ</a:t>
@@ -19710,6 +19824,7 @@
                   <a:srgbClr val="1B3B6F"/>
                 </a:solidFill>
                 <a:latin typeface="Amiri" pitchFamily="2" charset="-78"/>
+                <a:ea typeface="Amiri" pitchFamily="2" charset="-78"/>
                 <a:cs typeface="Amiri" pitchFamily="2" charset="-78"/>
               </a:rPr>
               <a:t>النَّادِي الَّذِي تَخْتَارُهُ</a:t>
@@ -19954,6 +20069,7 @@
                   <a:srgbClr val="1B3B6F"/>
                 </a:solidFill>
                 <a:latin typeface="Amiri" pitchFamily="2" charset="-78"/>
+                <a:ea typeface="Amiri" pitchFamily="2" charset="-78"/>
                 <a:cs typeface="Amiri" pitchFamily="2" charset="-78"/>
               </a:rPr>
               <a:t>كَمْ سَاعَةً فِي الأُسْبُوعِ؟</a:t>
@@ -20133,6 +20249,7 @@
                   <a:srgbClr val="1B3B6F"/>
                 </a:solidFill>
                 <a:latin typeface="Amiri" pitchFamily="2" charset="-78"/>
+                <a:ea typeface="Amiri" pitchFamily="2" charset="-78"/>
                 <a:cs typeface="Amiri" pitchFamily="2" charset="-78"/>
               </a:rPr>
               <a:t>جُمْلَةٌ: لِمَاذَا تُرِيدُ الاشْتِرَاكَ؟</a:t>
@@ -20342,6 +20459,7 @@
                   <a:srgbClr val="D4AF37"/>
                 </a:solidFill>
                 <a:latin typeface="Amiri" pitchFamily="2" charset="-78"/>
+                <a:ea typeface="Amiri" pitchFamily="2" charset="-78"/>
                 <a:cs typeface="Amiri" pitchFamily="2" charset="-78"/>
               </a:rPr>
               <a:t>م</a:t>
@@ -20662,6 +20780,7 @@
                   <a:srgbClr val="8A6D1E"/>
                 </a:solidFill>
                 <a:latin typeface="Amiri" pitchFamily="2" charset="-78"/>
+                <a:ea typeface="Amiri" pitchFamily="2" charset="-78"/>
                 <a:cs typeface="Amiri" pitchFamily="2" charset="-78"/>
               </a:rPr>
               <a:t>نَمُوذَجُ الإِجَابَةِ</a:t>
@@ -20980,6 +21099,7 @@
                   <a:srgbClr val="1B3B6F"/>
                 </a:solidFill>
                 <a:latin typeface="Amiri" pitchFamily="2" charset="-78"/>
+                <a:ea typeface="Amiri" pitchFamily="2" charset="-78"/>
                 <a:cs typeface="Amiri" pitchFamily="2" charset="-78"/>
               </a:rPr>
               <a:t>يُوسُفُ عَلِيٌّ</a:t>
@@ -21018,6 +21138,7 @@
                   <a:srgbClr val="1B3B6F"/>
                 </a:solidFill>
                 <a:latin typeface="Amiri" pitchFamily="2" charset="-78"/>
+                <a:ea typeface="Amiri" pitchFamily="2" charset="-78"/>
                 <a:cs typeface="Amiri" pitchFamily="2" charset="-78"/>
               </a:rPr>
               <a:t>الاسْمُ</a:t>
@@ -21159,6 +21280,7 @@
                   <a:srgbClr val="1B3B6F"/>
                 </a:solidFill>
                 <a:latin typeface="Amiri" pitchFamily="2" charset="-78"/>
+                <a:ea typeface="Amiri" pitchFamily="2" charset="-78"/>
                 <a:cs typeface="Amiri" pitchFamily="2" charset="-78"/>
               </a:rPr>
               <a:t>الثَّانِيَ عَشَرَ مِنْ يُونْيُو</a:t>
@@ -21197,6 +21319,7 @@
                   <a:srgbClr val="1B3B6F"/>
                 </a:solidFill>
                 <a:latin typeface="Amiri" pitchFamily="2" charset="-78"/>
+                <a:ea typeface="Amiri" pitchFamily="2" charset="-78"/>
                 <a:cs typeface="Amiri" pitchFamily="2" charset="-78"/>
               </a:rPr>
               <a:t>تَارِيخُ المِيلَادِ</a:t>
@@ -21338,6 +21461,7 @@
                   <a:srgbClr val="1B3B6F"/>
                 </a:solidFill>
                 <a:latin typeface="Amiri" pitchFamily="2" charset="-78"/>
+                <a:ea typeface="Amiri" pitchFamily="2" charset="-78"/>
                 <a:cs typeface="Amiri" pitchFamily="2" charset="-78"/>
               </a:rPr>
               <a:t>الصَّفُّ العَاشِرُ</a:t>
@@ -21376,6 +21500,7 @@
                   <a:srgbClr val="1B3B6F"/>
                 </a:solidFill>
                 <a:latin typeface="Amiri" pitchFamily="2" charset="-78"/>
+                <a:ea typeface="Amiri" pitchFamily="2" charset="-78"/>
                 <a:cs typeface="Amiri" pitchFamily="2" charset="-78"/>
               </a:rPr>
               <a:t>الصَّفُّ</a:t>
@@ -21517,6 +21642,7 @@
                   <a:srgbClr val="1B3B6F"/>
                 </a:solidFill>
                 <a:latin typeface="Amiri" pitchFamily="2" charset="-78"/>
+                <a:ea typeface="Amiri" pitchFamily="2" charset="-78"/>
                 <a:cs typeface="Amiri" pitchFamily="2" charset="-78"/>
               </a:rPr>
               <a:t>الثُّلَاثَاءُ وَالخَمِيسُ</a:t>
@@ -21555,6 +21681,7 @@
                   <a:srgbClr val="1B3B6F"/>
                 </a:solidFill>
                 <a:latin typeface="Amiri" pitchFamily="2" charset="-78"/>
+                <a:ea typeface="Amiri" pitchFamily="2" charset="-78"/>
                 <a:cs typeface="Amiri" pitchFamily="2" charset="-78"/>
               </a:rPr>
               <a:t>الأَيَّامُ المُنَاسِبَةُ</a:t>
@@ -21696,6 +21823,7 @@
                   <a:srgbClr val="1B3B6F"/>
                 </a:solidFill>
                 <a:latin typeface="Amiri" pitchFamily="2" charset="-78"/>
+                <a:ea typeface="Amiri" pitchFamily="2" charset="-78"/>
                 <a:cs typeface="Amiri" pitchFamily="2" charset="-78"/>
               </a:rPr>
               <a:t>السَّاعَةُ الرَّابِعَةُ</a:t>
@@ -21734,6 +21862,7 @@
                   <a:srgbClr val="1B3B6F"/>
                 </a:solidFill>
                 <a:latin typeface="Amiri" pitchFamily="2" charset="-78"/>
+                <a:ea typeface="Amiri" pitchFamily="2" charset="-78"/>
                 <a:cs typeface="Amiri" pitchFamily="2" charset="-78"/>
               </a:rPr>
               <a:t>الوَقْتُ المُنَاسِبُ</a:t>
@@ -21875,6 +22004,7 @@
                   <a:srgbClr val="1B3B6F"/>
                 </a:solidFill>
                 <a:latin typeface="Amiri" pitchFamily="2" charset="-78"/>
+                <a:ea typeface="Amiri" pitchFamily="2" charset="-78"/>
                 <a:cs typeface="Amiri" pitchFamily="2" charset="-78"/>
               </a:rPr>
               <a:t>نَادِي الشِّطْرَنْجِ</a:t>
@@ -21913,6 +22043,7 @@
                   <a:srgbClr val="1B3B6F"/>
                 </a:solidFill>
                 <a:latin typeface="Amiri" pitchFamily="2" charset="-78"/>
+                <a:ea typeface="Amiri" pitchFamily="2" charset="-78"/>
                 <a:cs typeface="Amiri" pitchFamily="2" charset="-78"/>
               </a:rPr>
               <a:t>النَّادِي الَّذِي تَخْتَارُهُ</a:t>
@@ -22054,6 +22185,7 @@
                   <a:srgbClr val="1B3B6F"/>
                 </a:solidFill>
                 <a:latin typeface="Amiri" pitchFamily="2" charset="-78"/>
+                <a:ea typeface="Amiri" pitchFamily="2" charset="-78"/>
                 <a:cs typeface="Amiri" pitchFamily="2" charset="-78"/>
               </a:rPr>
               <a:t>سَاعَتَانِ</a:t>
@@ -22092,6 +22224,7 @@
                   <a:srgbClr val="1B3B6F"/>
                 </a:solidFill>
                 <a:latin typeface="Amiri" pitchFamily="2" charset="-78"/>
+                <a:ea typeface="Amiri" pitchFamily="2" charset="-78"/>
                 <a:cs typeface="Amiri" pitchFamily="2" charset="-78"/>
               </a:rPr>
               <a:t>كَمْ سَاعَةً فِي الأُسْبُوعِ؟</a:t>
@@ -22233,6 +22366,7 @@
                   <a:srgbClr val="1B3B6F"/>
                 </a:solidFill>
                 <a:latin typeface="Amiri" pitchFamily="2" charset="-78"/>
+                <a:ea typeface="Amiri" pitchFamily="2" charset="-78"/>
                 <a:cs typeface="Amiri" pitchFamily="2" charset="-78"/>
               </a:rPr>
               <a:t>أُرِيدُ الاشْتِرَاكَ لِأَنِّي أُحِبُّ التَّفْكِيرَ وَالتَّحَدِّيَ.</a:t>
@@ -22271,6 +22405,7 @@
                   <a:srgbClr val="1B3B6F"/>
                 </a:solidFill>
                 <a:latin typeface="Amiri" pitchFamily="2" charset="-78"/>
+                <a:ea typeface="Amiri" pitchFamily="2" charset="-78"/>
                 <a:cs typeface="Amiri" pitchFamily="2" charset="-78"/>
               </a:rPr>
               <a:t>جُمْلَةٌ: لِمَاذَا تُرِيدُ الاشْتِرَاكَ؟</a:t>
@@ -22480,6 +22615,7 @@
                   <a:srgbClr val="D4AF37"/>
                 </a:solidFill>
                 <a:latin typeface="Amiri" pitchFamily="2" charset="-78"/>
+                <a:ea typeface="Amiri" pitchFamily="2" charset="-78"/>
                 <a:cs typeface="Amiri" pitchFamily="2" charset="-78"/>
               </a:rPr>
               <a:t>م</a:t>
@@ -22800,6 +22936,7 @@
                   <a:srgbClr val="8A6D1E"/>
                 </a:solidFill>
                 <a:latin typeface="Amiri" pitchFamily="2" charset="-78"/>
+                <a:ea typeface="Amiri" pitchFamily="2" charset="-78"/>
                 <a:cs typeface="Amiri" pitchFamily="2" charset="-78"/>
               </a:rPr>
               <a:t>رِسَالَةٌ عَنْ أُسْبُوعِي</a:t>
@@ -23275,6 +23412,7 @@
                   <a:srgbClr val="1B3B6F"/>
                 </a:solidFill>
                 <a:latin typeface="Amiri" pitchFamily="2" charset="-78"/>
+                <a:ea typeface="Amiri" pitchFamily="2" charset="-78"/>
                 <a:cs typeface="Amiri" pitchFamily="2" charset="-78"/>
               </a:rPr>
               <a:t>أُرِيدُ أَنْ أُخْبِرَكَ عَنْ …</a:t>
@@ -23351,6 +23489,7 @@
                   <a:srgbClr val="1B3B6F"/>
                 </a:solidFill>
                 <a:latin typeface="Amiri" pitchFamily="2" charset="-78"/>
+                <a:ea typeface="Amiri" pitchFamily="2" charset="-78"/>
                 <a:cs typeface="Amiri" pitchFamily="2" charset="-78"/>
               </a:rPr>
               <a:t>يَبْدَأُ اليَوْمُ فِي … وَيَنْتَهِي فِي …</a:t>
@@ -23427,6 +23566,7 @@
                   <a:srgbClr val="1B3B6F"/>
                 </a:solidFill>
                 <a:latin typeface="Amiri" pitchFamily="2" charset="-78"/>
+                <a:ea typeface="Amiri" pitchFamily="2" charset="-78"/>
                 <a:cs typeface="Amiri" pitchFamily="2" charset="-78"/>
               </a:rPr>
               <a:t>فِي نِهَايَةِ الأُسْبُوعِ المَاضِي …</a:t>
@@ -23503,6 +23643,7 @@
                   <a:srgbClr val="1B3B6F"/>
                 </a:solidFill>
                 <a:latin typeface="Amiri" pitchFamily="2" charset="-78"/>
+                <a:ea typeface="Amiri" pitchFamily="2" charset="-78"/>
                 <a:cs typeface="Amiri" pitchFamily="2" charset="-78"/>
               </a:rPr>
               <a:t>سَتَبْدَأُ العُطْلَةُ فِي …</a:t>
@@ -23674,6 +23815,7 @@
                   <a:srgbClr val="D4AF37"/>
                 </a:solidFill>
                 <a:latin typeface="Amiri" pitchFamily="2" charset="-78"/>
+                <a:ea typeface="Amiri" pitchFamily="2" charset="-78"/>
                 <a:cs typeface="Amiri" pitchFamily="2" charset="-78"/>
               </a:rPr>
               <a:t>م</a:t>
@@ -23994,6 +24136,7 @@
                   <a:srgbClr val="8A6D1E"/>
                 </a:solidFill>
                 <a:latin typeface="Amiri" pitchFamily="2" charset="-78"/>
+                <a:ea typeface="Amiri" pitchFamily="2" charset="-78"/>
                 <a:cs typeface="Amiri" pitchFamily="2" charset="-78"/>
               </a:rPr>
               <a:t>نَصُّ السُّؤَالِ</a:t>
@@ -24274,6 +24417,7 @@
                   <a:srgbClr val="1B3B6F"/>
                 </a:solidFill>
                 <a:latin typeface="Amiri" pitchFamily="2" charset="-78"/>
+                <a:ea typeface="Amiri" pitchFamily="2" charset="-78"/>
                 <a:cs typeface="Amiri" pitchFamily="2" charset="-78"/>
               </a:rPr>
               <a:t>اكْتُبْ رِسَالَةً إِلِكْتِرُونِيَّةً إِلَى صَدِيقٍ عَنْ أُسْبُوعِكَ الدِّرَاسِيِّ (٨٠–٩٠ كَلِمَةً).</a:t>
@@ -24415,6 +24559,7 @@
                   <a:srgbClr val="1B3B6F"/>
                 </a:solidFill>
                 <a:latin typeface="Amiri" pitchFamily="2" charset="-78"/>
+                <a:ea typeface="Amiri" pitchFamily="2" charset="-78"/>
                 <a:cs typeface="Amiri" pitchFamily="2" charset="-78"/>
               </a:rPr>
               <a:t>كَمْ يَوْمًا تَدْرُسُ، وَمَتَى يَبْدَأُ اليَوْمُ وَيَنْتَهِي؟</a:t>
@@ -24556,6 +24701,7 @@
                   <a:srgbClr val="1B3B6F"/>
                 </a:solidFill>
                 <a:latin typeface="Amiri" pitchFamily="2" charset="-78"/>
+                <a:ea typeface="Amiri" pitchFamily="2" charset="-78"/>
                 <a:cs typeface="Amiri" pitchFamily="2" charset="-78"/>
               </a:rPr>
               <a:t>مَا يَوْمُكَ المُفَضَّلُ؟ وَلِمَاذَا؟</a:t>
@@ -24697,6 +24843,7 @@
                   <a:srgbClr val="1B3B6F"/>
                 </a:solidFill>
                 <a:latin typeface="Amiri" pitchFamily="2" charset="-78"/>
+                <a:ea typeface="Amiri" pitchFamily="2" charset="-78"/>
                 <a:cs typeface="Amiri" pitchFamily="2" charset="-78"/>
               </a:rPr>
               <a:t>مَاذَا فَعَلْتَ فِي نِهَايَةِ الأُسْبُوعِ المَاضِي؟</a:t>
@@ -24838,6 +24985,7 @@
                   <a:srgbClr val="1B3B6F"/>
                 </a:solidFill>
                 <a:latin typeface="Amiri" pitchFamily="2" charset="-78"/>
+                <a:ea typeface="Amiri" pitchFamily="2" charset="-78"/>
                 <a:cs typeface="Amiri" pitchFamily="2" charset="-78"/>
               </a:rPr>
               <a:t>مَتَى تَبْدَأُ العُطْلَةُ القَادِمَةُ، وَمَاذَا سَتَفْعَلُ؟</a:t>
@@ -25047,6 +25195,7 @@
                   <a:srgbClr val="D4AF37"/>
                 </a:solidFill>
                 <a:latin typeface="Amiri" pitchFamily="2" charset="-78"/>
+                <a:ea typeface="Amiri" pitchFamily="2" charset="-78"/>
                 <a:cs typeface="Amiri" pitchFamily="2" charset="-78"/>
               </a:rPr>
               <a:t>م</a:t>
@@ -25367,6 +25516,7 @@
                   <a:srgbClr val="8A6D1E"/>
                 </a:solidFill>
                 <a:latin typeface="Amiri" pitchFamily="2" charset="-78"/>
+                <a:ea typeface="Amiri" pitchFamily="2" charset="-78"/>
                 <a:cs typeface="Amiri" pitchFamily="2" charset="-78"/>
               </a:rPr>
               <a:t>قَوَالِبُ الكِتَابَةِ</a:t>
@@ -25647,6 +25797,7 @@
                   <a:srgbClr val="1B3B6F"/>
                 </a:solidFill>
                 <a:latin typeface="Amiri" pitchFamily="2" charset="-78"/>
+                <a:ea typeface="Amiri" pitchFamily="2" charset="-78"/>
                 <a:cs typeface="Amiri" pitchFamily="2" charset="-78"/>
               </a:rPr>
               <a:t>مَرْحَبًا يَا ______ ، كَيْفَ حَالُكَ؟</a:t>
@@ -25853,6 +26004,7 @@
                   <a:srgbClr val="1B3B6F"/>
                 </a:solidFill>
                 <a:latin typeface="Amiri" pitchFamily="2" charset="-78"/>
+                <a:ea typeface="Amiri" pitchFamily="2" charset="-78"/>
                 <a:cs typeface="Amiri" pitchFamily="2" charset="-78"/>
               </a:rPr>
               <a:t>أَدْرُسُ ______ أَيَّامٍ. يَبْدَأُ اليَوْمُ فِي ______ وَيَنْتَهِي فِي ______ .</a:t>
@@ -26059,6 +26211,7 @@
                   <a:srgbClr val="1B3B6F"/>
                 </a:solidFill>
                 <a:latin typeface="Amiri" pitchFamily="2" charset="-78"/>
+                <a:ea typeface="Amiri" pitchFamily="2" charset="-78"/>
                 <a:cs typeface="Amiri" pitchFamily="2" charset="-78"/>
               </a:rPr>
               <a:t>يَوْمِي المُفَضَّلُ هُوَ ______ لِأَنَّ ______ .</a:t>
@@ -26265,6 +26418,7 @@
                   <a:srgbClr val="1B3B6F"/>
                 </a:solidFill>
                 <a:latin typeface="Amiri" pitchFamily="2" charset="-78"/>
+                <a:ea typeface="Amiri" pitchFamily="2" charset="-78"/>
                 <a:cs typeface="Amiri" pitchFamily="2" charset="-78"/>
               </a:rPr>
               <a:t>فِي نِهَايَةِ الأُسْبُوعِ المَاضِي ______ .</a:t>
@@ -26471,6 +26625,7 @@
                   <a:srgbClr val="1B3B6F"/>
                 </a:solidFill>
                 <a:latin typeface="Amiri" pitchFamily="2" charset="-78"/>
+                <a:ea typeface="Amiri" pitchFamily="2" charset="-78"/>
                 <a:cs typeface="Amiri" pitchFamily="2" charset="-78"/>
               </a:rPr>
               <a:t>تَبْدَأُ العُطْلَةُ فِي ______ ، وَسَوْفَ ______ .</a:t>
@@ -26677,6 +26832,7 @@
                   <a:srgbClr val="1B3B6F"/>
                 </a:solidFill>
                 <a:latin typeface="Amiri" pitchFamily="2" charset="-78"/>
+                <a:ea typeface="Amiri" pitchFamily="2" charset="-78"/>
                 <a:cs typeface="Amiri" pitchFamily="2" charset="-78"/>
               </a:rPr>
               <a:t>إِلَى اللِّقَاءِ، ______</a:t>
@@ -26916,13 +27072,9 @@
     <a:fontScheme name="Office">
       <a:majorFont>
         <a:latin typeface="Calibri Light" panose="020F0302020204030204"/>
-        <a:ea typeface=""/>
-        <a:cs typeface=""/>
-        <a:font script="Jpan" typeface="游ゴシック Light"/>
-        <a:font script="Hang" typeface="맑은 고딕"/>
-        <a:font script="Hans" typeface="等线 Light"/>
-        <a:font script="Hant" typeface="新細明體"/>
-        <a:font script="Arab" typeface="Times New Roman"/>
+        <a:ea typeface="Amiri" pitchFamily="2" charset="-78"/>
+        <a:cs typeface="Amiri" pitchFamily="2" charset="-78"/>
+        <a:font script="Arab" typeface="Amiri"/>
         <a:font script="Hebr" typeface="Times New Roman"/>
         <a:font script="Thai" typeface="Angsana New"/>
         <a:font script="Ethi" typeface="Nyala"/>
@@ -26968,13 +27120,9 @@
       </a:majorFont>
       <a:minorFont>
         <a:latin typeface="Calibri" panose="020F0502020204030204"/>
-        <a:ea typeface=""/>
-        <a:cs typeface=""/>
-        <a:font script="Jpan" typeface="游ゴシック"/>
-        <a:font script="Hang" typeface="맑은 고딕"/>
-        <a:font script="Hans" typeface="等线"/>
-        <a:font script="Hant" typeface="新細明體"/>
-        <a:font script="Arab" typeface="Arial"/>
+        <a:ea typeface="Amiri" pitchFamily="2" charset="-78"/>
+        <a:cs typeface="Amiri" pitchFamily="2" charset="-78"/>
+        <a:font script="Arab" typeface="Amiri"/>
         <a:font script="Hebr" typeface="Arial"/>
         <a:font script="Thai" typeface="Cordia New"/>
         <a:font script="Ethi" typeface="Nyala"/>

--- a/Topic_A/Exam_Practice/AT-A-L02_Writing_Workshop_Calendar_Dates_and_the_School_Week.pptx
+++ b/Topic_A/Exam_Practice/AT-A-L02_Writing_Workshop_Calendar_Dates_and_the_School_Week.pptx
@@ -3852,7 +3852,7 @@
                 <a:solidFill>
                   <a:srgbClr val="FFFFFF"/>
                 </a:solidFill>
-                <a:latin typeface="Calibri" pitchFamily="34" charset="0"/>
+                <a:latin typeface="Amiri" pitchFamily="2" charset="-78"/>
                 <a:ea typeface="Amiri" pitchFamily="2" charset="-78"/>
                 <a:cs typeface="Amiri" pitchFamily="2" charset="-78"/>
               </a:rPr>
@@ -3918,7 +3918,7 @@
                 <a:solidFill>
                   <a:srgbClr val="FFFFFF"/>
                 </a:solidFill>
-                <a:latin typeface="Calibri" pitchFamily="34" charset="0"/>
+                <a:latin typeface="Amiri" pitchFamily="2" charset="-78"/>
                 <a:ea typeface="Amiri" pitchFamily="2" charset="-78"/>
                 <a:cs typeface="Amiri" pitchFamily="2" charset="-78"/>
               </a:rPr>
@@ -3984,7 +3984,7 @@
                 <a:solidFill>
                   <a:srgbClr val="FFFFFF"/>
                 </a:solidFill>
-                <a:latin typeface="Calibri" pitchFamily="34" charset="0"/>
+                <a:latin typeface="Amiri" pitchFamily="2" charset="-78"/>
                 <a:ea typeface="Amiri" pitchFamily="2" charset="-78"/>
                 <a:cs typeface="Amiri" pitchFamily="2" charset="-78"/>
               </a:rPr>
@@ -4050,7 +4050,7 @@
                 <a:solidFill>
                   <a:srgbClr val="FFFFFF"/>
                 </a:solidFill>
-                <a:latin typeface="Calibri" pitchFamily="34" charset="0"/>
+                <a:latin typeface="Amiri" pitchFamily="2" charset="-78"/>
                 <a:ea typeface="Amiri" pitchFamily="2" charset="-78"/>
                 <a:cs typeface="Amiri" pitchFamily="2" charset="-78"/>
               </a:rPr>
@@ -4848,7 +4848,7 @@
                 <a:solidFill>
                   <a:srgbClr val="FFFFFF"/>
                 </a:solidFill>
-                <a:latin typeface="Calibri" pitchFamily="34" charset="0"/>
+                <a:latin typeface="Amiri" pitchFamily="2" charset="-78"/>
                 <a:ea typeface="Amiri" pitchFamily="2" charset="-78"/>
                 <a:cs typeface="Amiri" pitchFamily="2" charset="-78"/>
               </a:rPr>
@@ -4914,7 +4914,7 @@
                 <a:solidFill>
                   <a:srgbClr val="FFFFFF"/>
                 </a:solidFill>
-                <a:latin typeface="Calibri" pitchFamily="34" charset="0"/>
+                <a:latin typeface="Amiri" pitchFamily="2" charset="-78"/>
                 <a:ea typeface="Amiri" pitchFamily="2" charset="-78"/>
                 <a:cs typeface="Amiri" pitchFamily="2" charset="-78"/>
               </a:rPr>
@@ -4980,7 +4980,7 @@
                 <a:solidFill>
                   <a:srgbClr val="FFFFFF"/>
                 </a:solidFill>
-                <a:latin typeface="Calibri" pitchFamily="34" charset="0"/>
+                <a:latin typeface="Amiri" pitchFamily="2" charset="-78"/>
                 <a:ea typeface="Amiri" pitchFamily="2" charset="-78"/>
                 <a:cs typeface="Amiri" pitchFamily="2" charset="-78"/>
               </a:rPr>
@@ -5046,7 +5046,7 @@
                 <a:solidFill>
                   <a:srgbClr val="FFFFFF"/>
                 </a:solidFill>
-                <a:latin typeface="Calibri" pitchFamily="34" charset="0"/>
+                <a:latin typeface="Amiri" pitchFamily="2" charset="-78"/>
                 <a:ea typeface="Amiri" pitchFamily="2" charset="-78"/>
                 <a:cs typeface="Amiri" pitchFamily="2" charset="-78"/>
               </a:rPr>
@@ -8606,7 +8606,7 @@
                 <a:solidFill>
                   <a:srgbClr val="FFFFFF"/>
                 </a:solidFill>
-                <a:latin typeface="Calibri" pitchFamily="34" charset="0"/>
+                <a:latin typeface="Amiri" pitchFamily="2" charset="-78"/>
                 <a:ea typeface="Amiri" pitchFamily="2" charset="-78"/>
                 <a:cs typeface="Amiri" pitchFamily="2" charset="-78"/>
               </a:rPr>
@@ -8672,7 +8672,7 @@
                 <a:solidFill>
                   <a:srgbClr val="FFFFFF"/>
                 </a:solidFill>
-                <a:latin typeface="Calibri" pitchFamily="34" charset="0"/>
+                <a:latin typeface="Amiri" pitchFamily="2" charset="-78"/>
                 <a:ea typeface="Amiri" pitchFamily="2" charset="-78"/>
                 <a:cs typeface="Amiri" pitchFamily="2" charset="-78"/>
               </a:rPr>
@@ -8738,7 +8738,7 @@
                 <a:solidFill>
                   <a:srgbClr val="FFFFFF"/>
                 </a:solidFill>
-                <a:latin typeface="Calibri" pitchFamily="34" charset="0"/>
+                <a:latin typeface="Amiri" pitchFamily="2" charset="-78"/>
                 <a:ea typeface="Amiri" pitchFamily="2" charset="-78"/>
                 <a:cs typeface="Amiri" pitchFamily="2" charset="-78"/>
               </a:rPr>
@@ -8804,7 +8804,7 @@
                 <a:solidFill>
                   <a:srgbClr val="FFFFFF"/>
                 </a:solidFill>
-                <a:latin typeface="Calibri" pitchFamily="34" charset="0"/>
+                <a:latin typeface="Amiri" pitchFamily="2" charset="-78"/>
                 <a:ea typeface="Amiri" pitchFamily="2" charset="-78"/>
                 <a:cs typeface="Amiri" pitchFamily="2" charset="-78"/>
               </a:rPr>
@@ -9591,7 +9591,7 @@
                 <a:solidFill>
                   <a:srgbClr val="FFFFFF"/>
                 </a:solidFill>
-                <a:latin typeface="Calibri" pitchFamily="34" charset="0"/>
+                <a:latin typeface="Amiri" pitchFamily="2" charset="-78"/>
                 <a:ea typeface="Amiri" pitchFamily="2" charset="-78"/>
                 <a:cs typeface="Amiri" pitchFamily="2" charset="-78"/>
               </a:rPr>
@@ -9657,7 +9657,7 @@
                 <a:solidFill>
                   <a:srgbClr val="FFFFFF"/>
                 </a:solidFill>
-                <a:latin typeface="Calibri" pitchFamily="34" charset="0"/>
+                <a:latin typeface="Amiri" pitchFamily="2" charset="-78"/>
                 <a:ea typeface="Amiri" pitchFamily="2" charset="-78"/>
                 <a:cs typeface="Amiri" pitchFamily="2" charset="-78"/>
               </a:rPr>
@@ -9723,7 +9723,7 @@
                 <a:solidFill>
                   <a:srgbClr val="FFFFFF"/>
                 </a:solidFill>
-                <a:latin typeface="Calibri" pitchFamily="34" charset="0"/>
+                <a:latin typeface="Amiri" pitchFamily="2" charset="-78"/>
                 <a:ea typeface="Amiri" pitchFamily="2" charset="-78"/>
                 <a:cs typeface="Amiri" pitchFamily="2" charset="-78"/>
               </a:rPr>
@@ -9789,7 +9789,7 @@
                 <a:solidFill>
                   <a:srgbClr val="FFFFFF"/>
                 </a:solidFill>
-                <a:latin typeface="Calibri" pitchFamily="34" charset="0"/>
+                <a:latin typeface="Amiri" pitchFamily="2" charset="-78"/>
                 <a:ea typeface="Amiri" pitchFamily="2" charset="-78"/>
                 <a:cs typeface="Amiri" pitchFamily="2" charset="-78"/>
               </a:rPr>
@@ -10576,7 +10576,7 @@
                 <a:solidFill>
                   <a:srgbClr val="FFFFFF"/>
                 </a:solidFill>
-                <a:latin typeface="Calibri" pitchFamily="34" charset="0"/>
+                <a:latin typeface="Amiri" pitchFamily="2" charset="-78"/>
                 <a:ea typeface="Amiri" pitchFamily="2" charset="-78"/>
                 <a:cs typeface="Amiri" pitchFamily="2" charset="-78"/>
               </a:rPr>
@@ -10642,7 +10642,7 @@
                 <a:solidFill>
                   <a:srgbClr val="FFFFFF"/>
                 </a:solidFill>
-                <a:latin typeface="Calibri" pitchFamily="34" charset="0"/>
+                <a:latin typeface="Amiri" pitchFamily="2" charset="-78"/>
                 <a:ea typeface="Amiri" pitchFamily="2" charset="-78"/>
                 <a:cs typeface="Amiri" pitchFamily="2" charset="-78"/>
               </a:rPr>
@@ -10708,7 +10708,7 @@
                 <a:solidFill>
                   <a:srgbClr val="FFFFFF"/>
                 </a:solidFill>
-                <a:latin typeface="Calibri" pitchFamily="34" charset="0"/>
+                <a:latin typeface="Amiri" pitchFamily="2" charset="-78"/>
                 <a:ea typeface="Amiri" pitchFamily="2" charset="-78"/>
                 <a:cs typeface="Amiri" pitchFamily="2" charset="-78"/>
               </a:rPr>
@@ -10774,7 +10774,7 @@
                 <a:solidFill>
                   <a:srgbClr val="FFFFFF"/>
                 </a:solidFill>
-                <a:latin typeface="Calibri" pitchFamily="34" charset="0"/>
+                <a:latin typeface="Amiri" pitchFamily="2" charset="-78"/>
                 <a:ea typeface="Amiri" pitchFamily="2" charset="-78"/>
                 <a:cs typeface="Amiri" pitchFamily="2" charset="-78"/>
               </a:rPr>
